--- a/output/doc/user-flow-decks/04-admin-field-rep-and-doctor-management.pptx
+++ b/output/doc/user-flow-decks/04-admin-field-rep-and-doctor-management.pptx
@@ -3363,7 +3363,7 @@
                 </a:solidFill>
                 <a:latin typeface="Aptos"/>
               </a:rPr>
-              <a:t>Generated: 2026-04-11</a:t>
+              <a:t>Generated: 2026-04-23</a:t>
             </a:r>
           </a:p>
         </p:txBody>
@@ -4431,7 +4431,7 @@
         <p:spPr>
           <a:xfrm>
             <a:off x="749808" y="1097280"/>
-            <a:ext cx="4023360" cy="256032"/>
+            <a:ext cx="3931920" cy="4754880"/>
           </a:xfrm>
           <a:prstGeom prst="rect">
             <a:avLst/>
@@ -4439,12 +4439,19 @@
           <a:noFill/>
         </p:spPr>
         <p:txBody>
-          <a:bodyPr wrap="square" anchor="t">
+          <a:bodyPr wrap="square" lIns="0" rIns="0" tIns="0" bIns="0">
             <a:spAutoFit/>
           </a:bodyPr>
           <a:lstStyle/>
           <a:p>
-            <a:pPr algn="l"/>
+            <a:pPr algn="l">
+              <a:spcBef>
+                <a:spcPts val="0"/>
+              </a:spcBef>
+              <a:spcAft>
+                <a:spcPts val="200"/>
+              </a:spcAft>
+            </a:pPr>
             <a:r>
               <a:rPr sz="1200" b="1">
                 <a:solidFill>
@@ -4455,33 +4462,20 @@
               <a:t>User action</a:t>
             </a:r>
           </a:p>
-        </p:txBody>
-      </p:sp>
-      <p:sp>
-        <p:nvSpPr>
-          <p:cNvPr id="8" name="TextBox 7"/>
-          <p:cNvSpPr txBox="1"/>
-          <p:nvPr/>
-        </p:nvSpPr>
-        <p:spPr>
-          <a:xfrm>
-            <a:off x="749808" y="1353312"/>
-            <a:ext cx="3931920" cy="621792"/>
-          </a:xfrm>
-          <a:prstGeom prst="rect">
-            <a:avLst/>
-          </a:prstGeom>
-          <a:noFill/>
-        </p:spPr>
-        <p:txBody>
-          <a:bodyPr wrap="square" anchor="t">
-            <a:spAutoFit/>
-          </a:bodyPr>
-          <a:lstStyle/>
-          <a:p>
-            <a:pPr algn="l"/>
-            <a:r>
-              <a:rPr sz="1600" b="0">
+          <a:p>
+            <a:pPr algn="l">
+              <a:lnSpc>
+                <a:spcPct val="110000"/>
+              </a:lnSpc>
+              <a:spcBef>
+                <a:spcPts val="0"/>
+              </a:spcBef>
+              <a:spcAft>
+                <a:spcPts val="800"/>
+              </a:spcAft>
+            </a:pPr>
+            <a:r>
+              <a:rPr sz="1200">
                 <a:solidFill>
                   <a:srgbClr val="102A43"/>
                 </a:solidFill>
@@ -4490,31 +4484,15 @@
               <a:t>Navigate to the field-rep list and optionally keep the campaign filter in the URL.</a:t>
             </a:r>
           </a:p>
-        </p:txBody>
-      </p:sp>
-      <p:sp>
-        <p:nvSpPr>
-          <p:cNvPr id="9" name="TextBox 8"/>
-          <p:cNvSpPr txBox="1"/>
-          <p:nvPr/>
-        </p:nvSpPr>
-        <p:spPr>
-          <a:xfrm>
-            <a:off x="749808" y="2011680"/>
-            <a:ext cx="4023360" cy="256032"/>
-          </a:xfrm>
-          <a:prstGeom prst="rect">
-            <a:avLst/>
-          </a:prstGeom>
-          <a:noFill/>
-        </p:spPr>
-        <p:txBody>
-          <a:bodyPr wrap="square" anchor="t">
-            <a:spAutoFit/>
-          </a:bodyPr>
-          <a:lstStyle/>
-          <a:p>
-            <a:pPr algn="l"/>
+          <a:p>
+            <a:pPr algn="l">
+              <a:spcBef>
+                <a:spcPts val="0"/>
+              </a:spcBef>
+              <a:spcAft>
+                <a:spcPts val="200"/>
+              </a:spcAft>
+            </a:pPr>
             <a:r>
               <a:rPr sz="1200" b="1">
                 <a:solidFill>
@@ -4525,66 +4503,37 @@
               <a:t>What appears on screen</a:t>
             </a:r>
           </a:p>
-        </p:txBody>
-      </p:sp>
-      <p:sp>
-        <p:nvSpPr>
-          <p:cNvPr id="10" name="TextBox 9"/>
-          <p:cNvSpPr txBox="1"/>
-          <p:nvPr/>
-        </p:nvSpPr>
-        <p:spPr>
-          <a:xfrm>
-            <a:off x="749808" y="2267712"/>
-            <a:ext cx="3931920" cy="713232"/>
-          </a:xfrm>
-          <a:prstGeom prst="rect">
-            <a:avLst/>
-          </a:prstGeom>
-          <a:noFill/>
-        </p:spPr>
-        <p:txBody>
-          <a:bodyPr wrap="square" anchor="t">
-            <a:spAutoFit/>
-          </a:bodyPr>
-          <a:lstStyle/>
-          <a:p>
-            <a:pPr algn="l"/>
-            <a:r>
-              <a:rPr sz="1600" b="0">
+          <a:p>
+            <a:pPr algn="l">
+              <a:lnSpc>
+                <a:spcPct val="110000"/>
+              </a:lnSpc>
+              <a:spcBef>
+                <a:spcPts val="0"/>
+              </a:spcBef>
+              <a:spcAft>
+                <a:spcPts val="800"/>
+              </a:spcAft>
+            </a:pPr>
+            <a:r>
+              <a:rPr sz="1200">
                 <a:solidFill>
                   <a:srgbClr val="102A43"/>
                 </a:solidFill>
                 <a:latin typeface="Aptos"/>
               </a:rPr>
-              <a:t>A table of master field reps with unique ID, field ID, Gmail ID, phone number, campaign mapping, and action buttons.</a:t>
-            </a:r>
-          </a:p>
-        </p:txBody>
-      </p:sp>
-      <p:sp>
-        <p:nvSpPr>
-          <p:cNvPr id="11" name="TextBox 10"/>
-          <p:cNvSpPr txBox="1"/>
-          <p:nvPr/>
-        </p:nvSpPr>
-        <p:spPr>
-          <a:xfrm>
-            <a:off x="749808" y="3063240"/>
-            <a:ext cx="4023360" cy="256032"/>
-          </a:xfrm>
-          <a:prstGeom prst="rect">
-            <a:avLst/>
-          </a:prstGeom>
-          <a:noFill/>
-        </p:spPr>
-        <p:txBody>
-          <a:bodyPr wrap="square" anchor="t">
-            <a:spAutoFit/>
-          </a:bodyPr>
-          <a:lstStyle/>
-          <a:p>
-            <a:pPr algn="l"/>
+              <a:t>A table of master field reps with unique ID, field ID, Gmail ID, phone number, campaign mapping, a search box, and row actions for `Edit`, `Delete`, and `View Doctors`.</a:t>
+            </a:r>
+          </a:p>
+          <a:p>
+            <a:pPr algn="l">
+              <a:spcBef>
+                <a:spcPts val="0"/>
+              </a:spcBef>
+              <a:spcAft>
+                <a:spcPts val="200"/>
+              </a:spcAft>
+            </a:pPr>
             <a:r>
               <a:rPr sz="1200" b="1">
                 <a:solidFill>
@@ -4595,33 +4544,20 @@
               <a:t>Why it matters</a:t>
             </a:r>
           </a:p>
-        </p:txBody>
-      </p:sp>
-      <p:sp>
-        <p:nvSpPr>
-          <p:cNvPr id="12" name="TextBox 11"/>
-          <p:cNvSpPr txBox="1"/>
-          <p:nvPr/>
-        </p:nvSpPr>
-        <p:spPr>
-          <a:xfrm>
-            <a:off x="749808" y="3319272"/>
-            <a:ext cx="3931920" cy="640080"/>
-          </a:xfrm>
-          <a:prstGeom prst="rect">
-            <a:avLst/>
-          </a:prstGeom>
-          <a:noFill/>
-        </p:spPr>
-        <p:txBody>
-          <a:bodyPr wrap="square" anchor="t">
-            <a:spAutoFit/>
-          </a:bodyPr>
-          <a:lstStyle/>
-          <a:p>
-            <a:pPr algn="l"/>
-            <a:r>
-              <a:rPr sz="1500" b="0">
+          <a:p>
+            <a:pPr algn="l">
+              <a:lnSpc>
+                <a:spcPct val="110000"/>
+              </a:lnSpc>
+              <a:spcBef>
+                <a:spcPts val="0"/>
+              </a:spcBef>
+              <a:spcAft>
+                <a:spcPts val="800"/>
+              </a:spcAft>
+            </a:pPr>
+            <a:r>
+              <a:rPr sz="1200">
                 <a:solidFill>
                   <a:srgbClr val="102A43"/>
                 </a:solidFill>
@@ -4630,31 +4566,15 @@
               <a:t>Campaign filtering reduces noise and keeps training focused on the reps that actually matter for a launch.</a:t>
             </a:r>
           </a:p>
-        </p:txBody>
-      </p:sp>
-      <p:sp>
-        <p:nvSpPr>
-          <p:cNvPr id="13" name="TextBox 12"/>
-          <p:cNvSpPr txBox="1"/>
-          <p:nvPr/>
-        </p:nvSpPr>
-        <p:spPr>
-          <a:xfrm>
-            <a:off x="749808" y="4069080"/>
-            <a:ext cx="4023360" cy="256032"/>
-          </a:xfrm>
-          <a:prstGeom prst="rect">
-            <a:avLst/>
-          </a:prstGeom>
-          <a:noFill/>
-        </p:spPr>
-        <p:txBody>
-          <a:bodyPr wrap="square" anchor="t">
-            <a:spAutoFit/>
-          </a:bodyPr>
-          <a:lstStyle/>
-          <a:p>
-            <a:pPr algn="l"/>
+          <a:p>
+            <a:pPr algn="l">
+              <a:spcBef>
+                <a:spcPts val="0"/>
+              </a:spcBef>
+              <a:spcAft>
+                <a:spcPts val="200"/>
+              </a:spcAft>
+            </a:pPr>
             <a:r>
               <a:rPr sz="1200" b="1">
                 <a:solidFill>
@@ -4665,33 +4585,20 @@
               <a:t>Expected result</a:t>
             </a:r>
           </a:p>
-        </p:txBody>
-      </p:sp>
-      <p:sp>
-        <p:nvSpPr>
-          <p:cNvPr id="14" name="TextBox 13"/>
-          <p:cNvSpPr txBox="1"/>
-          <p:nvPr/>
-        </p:nvSpPr>
-        <p:spPr>
-          <a:xfrm>
-            <a:off x="749808" y="4325112"/>
-            <a:ext cx="3931920" cy="566928"/>
-          </a:xfrm>
-          <a:prstGeom prst="rect">
-            <a:avLst/>
-          </a:prstGeom>
-          <a:noFill/>
-        </p:spPr>
-        <p:txBody>
-          <a:bodyPr wrap="square" anchor="t">
-            <a:spAutoFit/>
-          </a:bodyPr>
-          <a:lstStyle/>
-          <a:p>
-            <a:pPr algn="l"/>
-            <a:r>
-              <a:rPr sz="1500" b="0">
+          <a:p>
+            <a:pPr algn="l">
+              <a:lnSpc>
+                <a:spcPct val="110000"/>
+              </a:lnSpc>
+              <a:spcBef>
+                <a:spcPts val="0"/>
+              </a:spcBef>
+              <a:spcAft>
+                <a:spcPts val="800"/>
+              </a:spcAft>
+            </a:pPr>
+            <a:r>
+              <a:rPr sz="1200">
                 <a:solidFill>
                   <a:srgbClr val="102A43"/>
                 </a:solidFill>
@@ -4700,31 +4607,15 @@
               <a:t>The admin can see exactly which reps are assigned to the selected campaign.</a:t>
             </a:r>
           </a:p>
-        </p:txBody>
-      </p:sp>
-      <p:sp>
-        <p:nvSpPr>
-          <p:cNvPr id="15" name="TextBox 14"/>
-          <p:cNvSpPr txBox="1"/>
-          <p:nvPr/>
-        </p:nvSpPr>
-        <p:spPr>
-          <a:xfrm>
-            <a:off x="749808" y="4965192"/>
-            <a:ext cx="4023360" cy="256032"/>
-          </a:xfrm>
-          <a:prstGeom prst="rect">
-            <a:avLst/>
-          </a:prstGeom>
-          <a:noFill/>
-        </p:spPr>
-        <p:txBody>
-          <a:bodyPr wrap="square" anchor="t">
-            <a:spAutoFit/>
-          </a:bodyPr>
-          <a:lstStyle/>
-          <a:p>
-            <a:pPr algn="l"/>
+          <a:p>
+            <a:pPr algn="l">
+              <a:spcBef>
+                <a:spcPts val="0"/>
+              </a:spcBef>
+              <a:spcAft>
+                <a:spcPts val="200"/>
+              </a:spcAft>
+            </a:pPr>
             <a:r>
               <a:rPr sz="1200" b="1">
                 <a:solidFill>
@@ -4735,46 +4626,33 @@
               <a:t>Trainer note</a:t>
             </a:r>
           </a:p>
-        </p:txBody>
-      </p:sp>
-      <p:sp>
-        <p:nvSpPr>
-          <p:cNvPr id="16" name="TextBox 15"/>
-          <p:cNvSpPr txBox="1"/>
-          <p:nvPr/>
-        </p:nvSpPr>
-        <p:spPr>
-          <a:xfrm>
-            <a:off x="749808" y="5212080"/>
-            <a:ext cx="3931920" cy="640080"/>
-          </a:xfrm>
-          <a:prstGeom prst="rect">
-            <a:avLst/>
-          </a:prstGeom>
-          <a:noFill/>
-        </p:spPr>
-        <p:txBody>
-          <a:bodyPr wrap="square" anchor="t">
-            <a:spAutoFit/>
-          </a:bodyPr>
-          <a:lstStyle/>
-          <a:p>
-            <a:pPr algn="l"/>
-            <a:r>
-              <a:rPr sz="1300" b="0">
+          <a:p>
+            <a:pPr algn="l">
+              <a:lnSpc>
+                <a:spcPct val="110000"/>
+              </a:lnSpc>
+              <a:spcBef>
+                <a:spcPts val="0"/>
+              </a:spcBef>
+              <a:spcAft>
+                <a:spcPts val="0"/>
+              </a:spcAft>
+            </a:pPr>
+            <a:r>
+              <a:rPr sz="1100">
                 <a:solidFill>
                   <a:srgbClr val="52667A"/>
                 </a:solidFill>
                 <a:latin typeface="Aptos"/>
               </a:rPr>
-              <a:t>The list mixes master-table data with a display-friendly campaign mapping string to make the assignment state easy to explain.</a:t>
-            </a:r>
-          </a:p>
-        </p:txBody>
-      </p:sp>
-      <p:sp>
-        <p:nvSpPr>
-          <p:cNvPr id="17" name="Rounded Rectangle 16"/>
+              <a:t>The list mixes master-table data with a display-friendly campaign mapping string to make the assignment state easy to explain. When a campaign filter is present, the `Add Field Rep` button can redirect to the external field-rep site rather than the local Django form.</a:t>
+            </a:r>
+          </a:p>
+        </p:txBody>
+      </p:sp>
+      <p:sp>
+        <p:nvSpPr>
+          <p:cNvPr id="8" name="Rounded Rectangle 7"/>
           <p:cNvSpPr/>
           <p:nvPr/>
         </p:nvSpPr>
@@ -4819,7 +4697,7 @@
       </p:sp>
       <p:sp>
         <p:nvSpPr>
-          <p:cNvPr id="18" name="TextBox 17"/>
+          <p:cNvPr id="9" name="TextBox 8"/>
           <p:cNvSpPr txBox="1"/>
           <p:nvPr/>
         </p:nvSpPr>
@@ -4854,7 +4732,7 @@
       </p:sp>
       <p:pic>
         <p:nvPicPr>
-          <p:cNvPr id="19" name="Picture 18" descr="fieldrep-list.png"/>
+          <p:cNvPr id="10" name="Picture 9" descr="fieldrep-list.png"/>
           <p:cNvPicPr>
             <a:picLocks noChangeAspect="1"/>
           </p:cNvPicPr>
@@ -4878,7 +4756,7 @@
       </p:pic>
       <p:sp>
         <p:nvSpPr>
-          <p:cNvPr id="20" name="TextBox 19"/>
+          <p:cNvPr id="11" name="TextBox 10"/>
           <p:cNvSpPr txBox="1"/>
           <p:nvPr/>
         </p:nvSpPr>
@@ -4913,7 +4791,7 @@
       </p:sp>
       <p:sp>
         <p:nvSpPr>
-          <p:cNvPr id="21" name="TextBox 20"/>
+          <p:cNvPr id="12" name="TextBox 11"/>
           <p:cNvSpPr txBox="1"/>
           <p:nvPr/>
         </p:nvSpPr>
@@ -5186,7 +5064,7 @@
         <p:spPr>
           <a:xfrm>
             <a:off x="749808" y="1097280"/>
-            <a:ext cx="4023360" cy="256032"/>
+            <a:ext cx="3931920" cy="4754880"/>
           </a:xfrm>
           <a:prstGeom prst="rect">
             <a:avLst/>
@@ -5194,12 +5072,19 @@
           <a:noFill/>
         </p:spPr>
         <p:txBody>
-          <a:bodyPr wrap="square" anchor="t">
+          <a:bodyPr wrap="square" lIns="0" rIns="0" tIns="0" bIns="0">
             <a:spAutoFit/>
           </a:bodyPr>
           <a:lstStyle/>
           <a:p>
-            <a:pPr algn="l"/>
+            <a:pPr algn="l">
+              <a:spcBef>
+                <a:spcPts val="0"/>
+              </a:spcBef>
+              <a:spcAft>
+                <a:spcPts val="200"/>
+              </a:spcAft>
+            </a:pPr>
             <a:r>
               <a:rPr sz="1200" b="1">
                 <a:solidFill>
@@ -5210,33 +5095,20 @@
               <a:t>User action</a:t>
             </a:r>
           </a:p>
-        </p:txBody>
-      </p:sp>
-      <p:sp>
-        <p:nvSpPr>
-          <p:cNvPr id="8" name="TextBox 7"/>
-          <p:cNvSpPr txBox="1"/>
-          <p:nvPr/>
-        </p:nvSpPr>
-        <p:spPr>
-          <a:xfrm>
-            <a:off x="749808" y="1353312"/>
-            <a:ext cx="3931920" cy="621792"/>
-          </a:xfrm>
-          <a:prstGeom prst="rect">
-            <a:avLst/>
-          </a:prstGeom>
-          <a:noFill/>
-        </p:spPr>
-        <p:txBody>
-          <a:bodyPr wrap="square" anchor="t">
-            <a:spAutoFit/>
-          </a:bodyPr>
-          <a:lstStyle/>
-          <a:p>
-            <a:pPr algn="l"/>
-            <a:r>
-              <a:rPr sz="1600" b="0">
+          <a:p>
+            <a:pPr algn="l">
+              <a:lnSpc>
+                <a:spcPct val="110000"/>
+              </a:lnSpc>
+              <a:spcBef>
+                <a:spcPts val="0"/>
+              </a:spcBef>
+              <a:spcAft>
+                <a:spcPts val="800"/>
+              </a:spcAft>
+            </a:pPr>
+            <a:r>
+              <a:rPr sz="1200">
                 <a:solidFill>
                   <a:srgbClr val="102A43"/>
                 </a:solidFill>
@@ -5245,31 +5117,15 @@
               <a:t>Open the add or edit field-rep form, confirm the contact details, and keep the campaign context intact.</a:t>
             </a:r>
           </a:p>
-        </p:txBody>
-      </p:sp>
-      <p:sp>
-        <p:nvSpPr>
-          <p:cNvPr id="9" name="TextBox 8"/>
-          <p:cNvSpPr txBox="1"/>
-          <p:nvPr/>
-        </p:nvSpPr>
-        <p:spPr>
-          <a:xfrm>
-            <a:off x="749808" y="2011680"/>
-            <a:ext cx="4023360" cy="256032"/>
-          </a:xfrm>
-          <a:prstGeom prst="rect">
-            <a:avLst/>
-          </a:prstGeom>
-          <a:noFill/>
-        </p:spPr>
-        <p:txBody>
-          <a:bodyPr wrap="square" anchor="t">
-            <a:spAutoFit/>
-          </a:bodyPr>
-          <a:lstStyle/>
-          <a:p>
-            <a:pPr algn="l"/>
+          <a:p>
+            <a:pPr algn="l">
+              <a:spcBef>
+                <a:spcPts val="0"/>
+              </a:spcBef>
+              <a:spcAft>
+                <a:spcPts val="200"/>
+              </a:spcAft>
+            </a:pPr>
             <a:r>
               <a:rPr sz="1200" b="1">
                 <a:solidFill>
@@ -5280,66 +5136,37 @@
               <a:t>What appears on screen</a:t>
             </a:r>
           </a:p>
-        </p:txBody>
-      </p:sp>
-      <p:sp>
-        <p:nvSpPr>
-          <p:cNvPr id="10" name="TextBox 9"/>
-          <p:cNvSpPr txBox="1"/>
-          <p:nvPr/>
-        </p:nvSpPr>
-        <p:spPr>
-          <a:xfrm>
-            <a:off x="749808" y="2267712"/>
-            <a:ext cx="3931920" cy="713232"/>
-          </a:xfrm>
-          <a:prstGeom prst="rect">
-            <a:avLst/>
-          </a:prstGeom>
-          <a:noFill/>
-        </p:spPr>
-        <p:txBody>
-          <a:bodyPr wrap="square" anchor="t">
-            <a:spAutoFit/>
-          </a:bodyPr>
-          <a:lstStyle/>
-          <a:p>
-            <a:pPr algn="l"/>
-            <a:r>
-              <a:rPr sz="1600" b="0">
+          <a:p>
+            <a:pPr algn="l">
+              <a:lnSpc>
+                <a:spcPct val="110000"/>
+              </a:lnSpc>
+              <a:spcBef>
+                <a:spcPts val="0"/>
+              </a:spcBef>
+              <a:spcAft>
+                <a:spcPts val="800"/>
+              </a:spcAft>
+            </a:pPr>
+            <a:r>
+              <a:rPr sz="1200">
                 <a:solidFill>
                   <a:srgbClr val="102A43"/>
                 </a:solidFill>
                 <a:latin typeface="Aptos"/>
               </a:rPr>
-              <a:t>A standard field-rep form that writes back to the master data tables and preserves the campaign filter in the redirect.</a:t>
-            </a:r>
-          </a:p>
-        </p:txBody>
-      </p:sp>
-      <p:sp>
-        <p:nvSpPr>
-          <p:cNvPr id="11" name="TextBox 10"/>
-          <p:cNvSpPr txBox="1"/>
-          <p:nvPr/>
-        </p:nvSpPr>
-        <p:spPr>
-          <a:xfrm>
-            <a:off x="749808" y="3063240"/>
-            <a:ext cx="4023360" cy="256032"/>
-          </a:xfrm>
-          <a:prstGeom prst="rect">
-            <a:avLst/>
-          </a:prstGeom>
-          <a:noFill/>
-        </p:spPr>
-        <p:txBody>
-          <a:bodyPr wrap="square" anchor="t">
-            <a:spAutoFit/>
-          </a:bodyPr>
-          <a:lstStyle/>
-          <a:p>
-            <a:pPr algn="l"/>
+              <a:t>A standard field-rep form that writes back to the master data tables and preserves the campaign filter in the redirect when the local form is used.</a:t>
+            </a:r>
+          </a:p>
+          <a:p>
+            <a:pPr algn="l">
+              <a:spcBef>
+                <a:spcPts val="0"/>
+              </a:spcBef>
+              <a:spcAft>
+                <a:spcPts val="200"/>
+              </a:spcAft>
+            </a:pPr>
             <a:r>
               <a:rPr sz="1200" b="1">
                 <a:solidFill>
@@ -5350,33 +5177,20 @@
               <a:t>Why it matters</a:t>
             </a:r>
           </a:p>
-        </p:txBody>
-      </p:sp>
-      <p:sp>
-        <p:nvSpPr>
-          <p:cNvPr id="12" name="TextBox 11"/>
-          <p:cNvSpPr txBox="1"/>
-          <p:nvPr/>
-        </p:nvSpPr>
-        <p:spPr>
-          <a:xfrm>
-            <a:off x="749808" y="3319272"/>
-            <a:ext cx="3931920" cy="640080"/>
-          </a:xfrm>
-          <a:prstGeom prst="rect">
-            <a:avLst/>
-          </a:prstGeom>
-          <a:noFill/>
-        </p:spPr>
-        <p:txBody>
-          <a:bodyPr wrap="square" anchor="t">
-            <a:spAutoFit/>
-          </a:bodyPr>
-          <a:lstStyle/>
-          <a:p>
-            <a:pPr algn="l"/>
-            <a:r>
-              <a:rPr sz="1500" b="0">
+          <a:p>
+            <a:pPr algn="l">
+              <a:lnSpc>
+                <a:spcPct val="110000"/>
+              </a:lnSpc>
+              <a:spcBef>
+                <a:spcPts val="0"/>
+              </a:spcBef>
+              <a:spcAft>
+                <a:spcPts val="800"/>
+              </a:spcAft>
+            </a:pPr>
+            <a:r>
+              <a:rPr sz="1200">
                 <a:solidFill>
                   <a:srgbClr val="102A43"/>
                 </a:solidFill>
@@ -5385,31 +5199,15 @@
               <a:t>Rep identity and campaign assignment need to be correct before any field-rep login or sharing flow works.</a:t>
             </a:r>
           </a:p>
-        </p:txBody>
-      </p:sp>
-      <p:sp>
-        <p:nvSpPr>
-          <p:cNvPr id="13" name="TextBox 12"/>
-          <p:cNvSpPr txBox="1"/>
-          <p:nvPr/>
-        </p:nvSpPr>
-        <p:spPr>
-          <a:xfrm>
-            <a:off x="749808" y="4069080"/>
-            <a:ext cx="4023360" cy="256032"/>
-          </a:xfrm>
-          <a:prstGeom prst="rect">
-            <a:avLst/>
-          </a:prstGeom>
-          <a:noFill/>
-        </p:spPr>
-        <p:txBody>
-          <a:bodyPr wrap="square" anchor="t">
-            <a:spAutoFit/>
-          </a:bodyPr>
-          <a:lstStyle/>
-          <a:p>
-            <a:pPr algn="l"/>
+          <a:p>
+            <a:pPr algn="l">
+              <a:spcBef>
+                <a:spcPts val="0"/>
+              </a:spcBef>
+              <a:spcAft>
+                <a:spcPts val="200"/>
+              </a:spcAft>
+            </a:pPr>
             <a:r>
               <a:rPr sz="1200" b="1">
                 <a:solidFill>
@@ -5420,33 +5218,20 @@
               <a:t>Expected result</a:t>
             </a:r>
           </a:p>
-        </p:txBody>
-      </p:sp>
-      <p:sp>
-        <p:nvSpPr>
-          <p:cNvPr id="14" name="TextBox 13"/>
-          <p:cNvSpPr txBox="1"/>
-          <p:nvPr/>
-        </p:nvSpPr>
-        <p:spPr>
-          <a:xfrm>
-            <a:off x="749808" y="4325112"/>
-            <a:ext cx="3931920" cy="566928"/>
-          </a:xfrm>
-          <a:prstGeom prst="rect">
-            <a:avLst/>
-          </a:prstGeom>
-          <a:noFill/>
-        </p:spPr>
-        <p:txBody>
-          <a:bodyPr wrap="square" anchor="t">
-            <a:spAutoFit/>
-          </a:bodyPr>
-          <a:lstStyle/>
-          <a:p>
-            <a:pPr algn="l"/>
-            <a:r>
-              <a:rPr sz="1500" b="0">
+          <a:p>
+            <a:pPr algn="l">
+              <a:lnSpc>
+                <a:spcPct val="110000"/>
+              </a:lnSpc>
+              <a:spcBef>
+                <a:spcPts val="0"/>
+              </a:spcBef>
+              <a:spcAft>
+                <a:spcPts val="800"/>
+              </a:spcAft>
+            </a:pPr>
+            <a:r>
+              <a:rPr sz="1200">
                 <a:solidFill>
                   <a:srgbClr val="102A43"/>
                 </a:solidFill>
@@ -5455,31 +5240,15 @@
               <a:t>The rep is active, reachable, and assigned to the right campaign.</a:t>
             </a:r>
           </a:p>
-        </p:txBody>
-      </p:sp>
-      <p:sp>
-        <p:nvSpPr>
-          <p:cNvPr id="15" name="TextBox 14"/>
-          <p:cNvSpPr txBox="1"/>
-          <p:nvPr/>
-        </p:nvSpPr>
-        <p:spPr>
-          <a:xfrm>
-            <a:off x="749808" y="4965192"/>
-            <a:ext cx="4023360" cy="256032"/>
-          </a:xfrm>
-          <a:prstGeom prst="rect">
-            <a:avLst/>
-          </a:prstGeom>
-          <a:noFill/>
-        </p:spPr>
-        <p:txBody>
-          <a:bodyPr wrap="square" anchor="t">
-            <a:spAutoFit/>
-          </a:bodyPr>
-          <a:lstStyle/>
-          <a:p>
-            <a:pPr algn="l"/>
+          <a:p>
+            <a:pPr algn="l">
+              <a:spcBef>
+                <a:spcPts val="0"/>
+              </a:spcBef>
+              <a:spcAft>
+                <a:spcPts val="200"/>
+              </a:spcAft>
+            </a:pPr>
             <a:r>
               <a:rPr sz="1200" b="1">
                 <a:solidFill>
@@ -5490,33 +5259,20 @@
               <a:t>Trainer note</a:t>
             </a:r>
           </a:p>
-        </p:txBody>
-      </p:sp>
-      <p:sp>
-        <p:nvSpPr>
-          <p:cNvPr id="16" name="TextBox 15"/>
-          <p:cNvSpPr txBox="1"/>
-          <p:nvPr/>
-        </p:nvSpPr>
-        <p:spPr>
-          <a:xfrm>
-            <a:off x="749808" y="5212080"/>
-            <a:ext cx="3931920" cy="640080"/>
-          </a:xfrm>
-          <a:prstGeom prst="rect">
-            <a:avLst/>
-          </a:prstGeom>
-          <a:noFill/>
-        </p:spPr>
-        <p:txBody>
-          <a:bodyPr wrap="square" anchor="t">
-            <a:spAutoFit/>
-          </a:bodyPr>
-          <a:lstStyle/>
-          <a:p>
-            <a:pPr algn="l"/>
-            <a:r>
-              <a:rPr sz="1300" b="0">
+          <a:p>
+            <a:pPr algn="l">
+              <a:lnSpc>
+                <a:spcPct val="110000"/>
+              </a:lnSpc>
+              <a:spcBef>
+                <a:spcPts val="0"/>
+              </a:spcBef>
+              <a:spcAft>
+                <a:spcPts val="0"/>
+              </a:spcAft>
+            </a:pPr>
+            <a:r>
+              <a:rPr sz="1100">
                 <a:solidFill>
                   <a:srgbClr val="52667A"/>
                 </a:solidFill>
@@ -5529,7 +5285,7 @@
       </p:sp>
       <p:sp>
         <p:nvSpPr>
-          <p:cNvPr id="17" name="Rounded Rectangle 16"/>
+          <p:cNvPr id="8" name="Rounded Rectangle 7"/>
           <p:cNvSpPr/>
           <p:nvPr/>
         </p:nvSpPr>
@@ -5574,7 +5330,7 @@
       </p:sp>
       <p:sp>
         <p:nvSpPr>
-          <p:cNvPr id="18" name="TextBox 17"/>
+          <p:cNvPr id="9" name="TextBox 8"/>
           <p:cNvSpPr txBox="1"/>
           <p:nvPr/>
         </p:nvSpPr>
@@ -5609,7 +5365,7 @@
       </p:sp>
       <p:pic>
         <p:nvPicPr>
-          <p:cNvPr id="19" name="Picture 18" descr="fieldrep-form.png"/>
+          <p:cNvPr id="10" name="Picture 9" descr="fieldrep-form.png"/>
           <p:cNvPicPr>
             <a:picLocks noChangeAspect="1"/>
           </p:cNvPicPr>
@@ -5633,7 +5389,7 @@
       </p:pic>
       <p:sp>
         <p:nvSpPr>
-          <p:cNvPr id="20" name="TextBox 19"/>
+          <p:cNvPr id="11" name="TextBox 10"/>
           <p:cNvSpPr txBox="1"/>
           <p:nvPr/>
         </p:nvSpPr>
@@ -5668,7 +5424,7 @@
       </p:sp>
       <p:sp>
         <p:nvSpPr>
-          <p:cNvPr id="21" name="TextBox 20"/>
+          <p:cNvPr id="12" name="TextBox 11"/>
           <p:cNvSpPr txBox="1"/>
           <p:nvPr/>
         </p:nvSpPr>
@@ -5941,7 +5697,7 @@
         <p:spPr>
           <a:xfrm>
             <a:off x="749808" y="1097280"/>
-            <a:ext cx="4023360" cy="256032"/>
+            <a:ext cx="3931920" cy="4754880"/>
           </a:xfrm>
           <a:prstGeom prst="rect">
             <a:avLst/>
@@ -5949,12 +5705,19 @@
           <a:noFill/>
         </p:spPr>
         <p:txBody>
-          <a:bodyPr wrap="square" anchor="t">
+          <a:bodyPr wrap="square" lIns="0" rIns="0" tIns="0" bIns="0">
             <a:spAutoFit/>
           </a:bodyPr>
           <a:lstStyle/>
           <a:p>
-            <a:pPr algn="l"/>
+            <a:pPr algn="l">
+              <a:spcBef>
+                <a:spcPts val="0"/>
+              </a:spcBef>
+              <a:spcAft>
+                <a:spcPts val="200"/>
+              </a:spcAft>
+            </a:pPr>
             <a:r>
               <a:rPr sz="1200" b="1">
                 <a:solidFill>
@@ -5965,66 +5728,37 @@
               <a:t>User action</a:t>
             </a:r>
           </a:p>
-        </p:txBody>
-      </p:sp>
-      <p:sp>
-        <p:nvSpPr>
-          <p:cNvPr id="8" name="TextBox 7"/>
-          <p:cNvSpPr txBox="1"/>
-          <p:nvPr/>
-        </p:nvSpPr>
-        <p:spPr>
-          <a:xfrm>
-            <a:off x="749808" y="1353312"/>
-            <a:ext cx="3931920" cy="621792"/>
-          </a:xfrm>
-          <a:prstGeom prst="rect">
-            <a:avLst/>
-          </a:prstGeom>
-          <a:noFill/>
-        </p:spPr>
-        <p:txBody>
-          <a:bodyPr wrap="square" anchor="t">
-            <a:spAutoFit/>
-          </a:bodyPr>
-          <a:lstStyle/>
-          <a:p>
-            <a:pPr algn="l"/>
-            <a:r>
-              <a:rPr sz="1600" b="0">
+          <a:p>
+            <a:pPr algn="l">
+              <a:lnSpc>
+                <a:spcPct val="110000"/>
+              </a:lnSpc>
+              <a:spcBef>
+                <a:spcPts val="0"/>
+              </a:spcBef>
+              <a:spcAft>
+                <a:spcPts val="800"/>
+              </a:spcAft>
+            </a:pPr>
+            <a:r>
+              <a:rPr sz="1300">
                 <a:solidFill>
                   <a:srgbClr val="102A43"/>
                 </a:solidFill>
                 <a:latin typeface="Aptos"/>
               </a:rPr>
-              <a:t>Use the View Doctors action to add, edit, or remove doctors associated with the rep.</a:t>
-            </a:r>
-          </a:p>
-        </p:txBody>
-      </p:sp>
-      <p:sp>
-        <p:nvSpPr>
-          <p:cNvPr id="9" name="TextBox 8"/>
-          <p:cNvSpPr txBox="1"/>
-          <p:nvPr/>
-        </p:nvSpPr>
-        <p:spPr>
-          <a:xfrm>
-            <a:off x="749808" y="2011680"/>
-            <a:ext cx="4023360" cy="256032"/>
-          </a:xfrm>
-          <a:prstGeom prst="rect">
-            <a:avLst/>
-          </a:prstGeom>
-          <a:noFill/>
-        </p:spPr>
-        <p:txBody>
-          <a:bodyPr wrap="square" anchor="t">
-            <a:spAutoFit/>
-          </a:bodyPr>
-          <a:lstStyle/>
-          <a:p>
-            <a:pPr algn="l"/>
+              <a:t>Use the `View Doctors` action to add a doctor from the inline form or edit/delete existing doctors associated with the rep.</a:t>
+            </a:r>
+          </a:p>
+          <a:p>
+            <a:pPr algn="l">
+              <a:spcBef>
+                <a:spcPts val="0"/>
+              </a:spcBef>
+              <a:spcAft>
+                <a:spcPts val="200"/>
+              </a:spcAft>
+            </a:pPr>
             <a:r>
               <a:rPr sz="1200" b="1">
                 <a:solidFill>
@@ -6035,66 +5769,37 @@
               <a:t>What appears on screen</a:t>
             </a:r>
           </a:p>
-        </p:txBody>
-      </p:sp>
-      <p:sp>
-        <p:nvSpPr>
-          <p:cNvPr id="10" name="TextBox 9"/>
-          <p:cNvSpPr txBox="1"/>
-          <p:nvPr/>
-        </p:nvSpPr>
-        <p:spPr>
-          <a:xfrm>
-            <a:off x="749808" y="2267712"/>
-            <a:ext cx="3931920" cy="713232"/>
-          </a:xfrm>
-          <a:prstGeom prst="rect">
-            <a:avLst/>
-          </a:prstGeom>
-          <a:noFill/>
-        </p:spPr>
-        <p:txBody>
-          <a:bodyPr wrap="square" anchor="t">
-            <a:spAutoFit/>
-          </a:bodyPr>
-          <a:lstStyle/>
-          <a:p>
-            <a:pPr algn="l"/>
-            <a:r>
-              <a:rPr sz="1600" b="0">
+          <a:p>
+            <a:pPr algn="l">
+              <a:lnSpc>
+                <a:spcPct val="110000"/>
+              </a:lnSpc>
+              <a:spcBef>
+                <a:spcPts val="0"/>
+              </a:spcBef>
+              <a:spcAft>
+                <a:spcPts val="800"/>
+              </a:spcAft>
+            </a:pPr>
+            <a:r>
+              <a:rPr sz="1300">
                 <a:solidFill>
                   <a:srgbClr val="102A43"/>
                 </a:solidFill>
                 <a:latin typeface="Aptos"/>
               </a:rPr>
-              <a:t>A rep-specific doctor list and a compact add-doctor form on the same page.</a:t>
-            </a:r>
-          </a:p>
-        </p:txBody>
-      </p:sp>
-      <p:sp>
-        <p:nvSpPr>
-          <p:cNvPr id="11" name="TextBox 10"/>
-          <p:cNvSpPr txBox="1"/>
-          <p:nvPr/>
-        </p:nvSpPr>
-        <p:spPr>
-          <a:xfrm>
-            <a:off x="749808" y="3063240"/>
-            <a:ext cx="4023360" cy="256032"/>
-          </a:xfrm>
-          <a:prstGeom prst="rect">
-            <a:avLst/>
-          </a:prstGeom>
-          <a:noFill/>
-        </p:spPr>
-        <p:txBody>
-          <a:bodyPr wrap="square" anchor="t">
-            <a:spAutoFit/>
-          </a:bodyPr>
-          <a:lstStyle/>
-          <a:p>
-            <a:pPr algn="l"/>
+              <a:t>A rep-specific doctor list with a compact add-doctor form at the top and `Edit` and `Delete` buttons beside each doctor row.</a:t>
+            </a:r>
+          </a:p>
+          <a:p>
+            <a:pPr algn="l">
+              <a:spcBef>
+                <a:spcPts val="0"/>
+              </a:spcBef>
+              <a:spcAft>
+                <a:spcPts val="200"/>
+              </a:spcAft>
+            </a:pPr>
             <a:r>
               <a:rPr sz="1200" b="1">
                 <a:solidFill>
@@ -6105,33 +5810,20 @@
               <a:t>Why it matters</a:t>
             </a:r>
           </a:p>
-        </p:txBody>
-      </p:sp>
-      <p:sp>
-        <p:nvSpPr>
-          <p:cNvPr id="12" name="TextBox 11"/>
-          <p:cNvSpPr txBox="1"/>
-          <p:nvPr/>
-        </p:nvSpPr>
-        <p:spPr>
-          <a:xfrm>
-            <a:off x="749808" y="3319272"/>
-            <a:ext cx="3931920" cy="640080"/>
-          </a:xfrm>
-          <a:prstGeom prst="rect">
-            <a:avLst/>
-          </a:prstGeom>
-          <a:noFill/>
-        </p:spPr>
-        <p:txBody>
-          <a:bodyPr wrap="square" anchor="t">
-            <a:spAutoFit/>
-          </a:bodyPr>
-          <a:lstStyle/>
-          <a:p>
-            <a:pPr algn="l"/>
-            <a:r>
-              <a:rPr sz="1500" b="0">
+          <a:p>
+            <a:pPr algn="l">
+              <a:lnSpc>
+                <a:spcPct val="110000"/>
+              </a:lnSpc>
+              <a:spcBef>
+                <a:spcPts val="0"/>
+              </a:spcBef>
+              <a:spcAft>
+                <a:spcPts val="800"/>
+              </a:spcAft>
+            </a:pPr>
+            <a:r>
+              <a:rPr sz="1300">
                 <a:solidFill>
                   <a:srgbClr val="102A43"/>
                 </a:solidFill>
@@ -6140,31 +5832,15 @@
               <a:t>Doctors created here become reusable share targets in the field-rep experience.</a:t>
             </a:r>
           </a:p>
-        </p:txBody>
-      </p:sp>
-      <p:sp>
-        <p:nvSpPr>
-          <p:cNvPr id="13" name="TextBox 12"/>
-          <p:cNvSpPr txBox="1"/>
-          <p:nvPr/>
-        </p:nvSpPr>
-        <p:spPr>
-          <a:xfrm>
-            <a:off x="749808" y="4069080"/>
-            <a:ext cx="4023360" cy="256032"/>
-          </a:xfrm>
-          <a:prstGeom prst="rect">
-            <a:avLst/>
-          </a:prstGeom>
-          <a:noFill/>
-        </p:spPr>
-        <p:txBody>
-          <a:bodyPr wrap="square" anchor="t">
-            <a:spAutoFit/>
-          </a:bodyPr>
-          <a:lstStyle/>
-          <a:p>
-            <a:pPr algn="l"/>
+          <a:p>
+            <a:pPr algn="l">
+              <a:spcBef>
+                <a:spcPts val="0"/>
+              </a:spcBef>
+              <a:spcAft>
+                <a:spcPts val="200"/>
+              </a:spcAft>
+            </a:pPr>
             <a:r>
               <a:rPr sz="1200" b="1">
                 <a:solidFill>
@@ -6175,33 +5851,20 @@
               <a:t>Expected result</a:t>
             </a:r>
           </a:p>
-        </p:txBody>
-      </p:sp>
-      <p:sp>
-        <p:nvSpPr>
-          <p:cNvPr id="14" name="TextBox 13"/>
-          <p:cNvSpPr txBox="1"/>
-          <p:nvPr/>
-        </p:nvSpPr>
-        <p:spPr>
-          <a:xfrm>
-            <a:off x="749808" y="4325112"/>
-            <a:ext cx="3931920" cy="566928"/>
-          </a:xfrm>
-          <a:prstGeom prst="rect">
-            <a:avLst/>
-          </a:prstGeom>
-          <a:noFill/>
-        </p:spPr>
-        <p:txBody>
-          <a:bodyPr wrap="square" anchor="t">
-            <a:spAutoFit/>
-          </a:bodyPr>
-          <a:lstStyle/>
-          <a:p>
-            <a:pPr algn="l"/>
-            <a:r>
-              <a:rPr sz="1500" b="0">
+          <a:p>
+            <a:pPr algn="l">
+              <a:lnSpc>
+                <a:spcPct val="110000"/>
+              </a:lnSpc>
+              <a:spcBef>
+                <a:spcPts val="0"/>
+              </a:spcBef>
+              <a:spcAft>
+                <a:spcPts val="800"/>
+              </a:spcAft>
+            </a:pPr>
+            <a:r>
+              <a:rPr sz="1300">
                 <a:solidFill>
                   <a:srgbClr val="102A43"/>
                 </a:solidFill>
@@ -6210,31 +5873,15 @@
               <a:t>The rep leaves with a clean doctor list that can support fast WhatsApp sharing.</a:t>
             </a:r>
           </a:p>
-        </p:txBody>
-      </p:sp>
-      <p:sp>
-        <p:nvSpPr>
-          <p:cNvPr id="15" name="TextBox 14"/>
-          <p:cNvSpPr txBox="1"/>
-          <p:nvPr/>
-        </p:nvSpPr>
-        <p:spPr>
-          <a:xfrm>
-            <a:off x="749808" y="4965192"/>
-            <a:ext cx="4023360" cy="256032"/>
-          </a:xfrm>
-          <a:prstGeom prst="rect">
-            <a:avLst/>
-          </a:prstGeom>
-          <a:noFill/>
-        </p:spPr>
-        <p:txBody>
-          <a:bodyPr wrap="square" anchor="t">
-            <a:spAutoFit/>
-          </a:bodyPr>
-          <a:lstStyle/>
-          <a:p>
-            <a:pPr algn="l"/>
+          <a:p>
+            <a:pPr algn="l">
+              <a:spcBef>
+                <a:spcPts val="0"/>
+              </a:spcBef>
+              <a:spcAft>
+                <a:spcPts val="200"/>
+              </a:spcAft>
+            </a:pPr>
             <a:r>
               <a:rPr sz="1200" b="1">
                 <a:solidFill>
@@ -6245,33 +5892,20 @@
               <a:t>Trainer note</a:t>
             </a:r>
           </a:p>
-        </p:txBody>
-      </p:sp>
-      <p:sp>
-        <p:nvSpPr>
-          <p:cNvPr id="16" name="TextBox 15"/>
-          <p:cNvSpPr txBox="1"/>
-          <p:nvPr/>
-        </p:nvSpPr>
-        <p:spPr>
-          <a:xfrm>
-            <a:off x="749808" y="5212080"/>
-            <a:ext cx="3931920" cy="640080"/>
-          </a:xfrm>
-          <a:prstGeom prst="rect">
-            <a:avLst/>
-          </a:prstGeom>
-          <a:noFill/>
-        </p:spPr>
-        <p:txBody>
-          <a:bodyPr wrap="square" anchor="t">
-            <a:spAutoFit/>
-          </a:bodyPr>
-          <a:lstStyle/>
-          <a:p>
-            <a:pPr algn="l"/>
-            <a:r>
-              <a:rPr sz="1300" b="0">
+          <a:p>
+            <a:pPr algn="l">
+              <a:lnSpc>
+                <a:spcPct val="110000"/>
+              </a:lnSpc>
+              <a:spcBef>
+                <a:spcPts val="0"/>
+              </a:spcBef>
+              <a:spcAft>
+                <a:spcPts val="0"/>
+              </a:spcAft>
+            </a:pPr>
+            <a:r>
+              <a:rPr sz="1200">
                 <a:solidFill>
                   <a:srgbClr val="52667A"/>
                 </a:solidFill>
@@ -6284,7 +5918,7 @@
       </p:sp>
       <p:sp>
         <p:nvSpPr>
-          <p:cNvPr id="17" name="Rounded Rectangle 16"/>
+          <p:cNvPr id="8" name="Rounded Rectangle 7"/>
           <p:cNvSpPr/>
           <p:nvPr/>
         </p:nvSpPr>
@@ -6329,7 +5963,7 @@
       </p:sp>
       <p:sp>
         <p:nvSpPr>
-          <p:cNvPr id="18" name="TextBox 17"/>
+          <p:cNvPr id="9" name="TextBox 8"/>
           <p:cNvSpPr txBox="1"/>
           <p:nvPr/>
         </p:nvSpPr>
@@ -6364,7 +5998,7 @@
       </p:sp>
       <p:pic>
         <p:nvPicPr>
-          <p:cNvPr id="19" name="Picture 18" descr="fieldrep-doctors.png"/>
+          <p:cNvPr id="10" name="Picture 9" descr="fieldrep-doctors.png"/>
           <p:cNvPicPr>
             <a:picLocks noChangeAspect="1"/>
           </p:cNvPicPr>
@@ -6388,7 +6022,7 @@
       </p:pic>
       <p:sp>
         <p:nvSpPr>
-          <p:cNvPr id="20" name="TextBox 19"/>
+          <p:cNvPr id="11" name="TextBox 10"/>
           <p:cNvSpPr txBox="1"/>
           <p:nvPr/>
         </p:nvSpPr>
@@ -6423,7 +6057,7 @@
       </p:sp>
       <p:sp>
         <p:nvSpPr>
-          <p:cNvPr id="21" name="TextBox 20"/>
+          <p:cNvPr id="12" name="TextBox 11"/>
           <p:cNvSpPr txBox="1"/>
           <p:nvPr/>
         </p:nvSpPr>
@@ -6696,7 +6330,7 @@
         <p:spPr>
           <a:xfrm>
             <a:off x="749808" y="1097280"/>
-            <a:ext cx="4023360" cy="256032"/>
+            <a:ext cx="3931920" cy="4754880"/>
           </a:xfrm>
           <a:prstGeom prst="rect">
             <a:avLst/>
@@ -6704,12 +6338,19 @@
           <a:noFill/>
         </p:spPr>
         <p:txBody>
-          <a:bodyPr wrap="square" anchor="t">
+          <a:bodyPr wrap="square" lIns="0" rIns="0" tIns="0" bIns="0">
             <a:spAutoFit/>
           </a:bodyPr>
           <a:lstStyle/>
           <a:p>
-            <a:pPr algn="l"/>
+            <a:pPr algn="l">
+              <a:spcBef>
+                <a:spcPts val="0"/>
+              </a:spcBef>
+              <a:spcAft>
+                <a:spcPts val="200"/>
+              </a:spcAft>
+            </a:pPr>
             <a:r>
               <a:rPr sz="1200" b="1">
                 <a:solidFill>
@@ -6720,33 +6361,20 @@
               <a:t>User action</a:t>
             </a:r>
           </a:p>
-        </p:txBody>
-      </p:sp>
-      <p:sp>
-        <p:nvSpPr>
-          <p:cNvPr id="8" name="TextBox 7"/>
-          <p:cNvSpPr txBox="1"/>
-          <p:nvPr/>
-        </p:nvSpPr>
-        <p:spPr>
-          <a:xfrm>
-            <a:off x="749808" y="1353312"/>
-            <a:ext cx="3931920" cy="621792"/>
-          </a:xfrm>
-          <a:prstGeom prst="rect">
-            <a:avLst/>
-          </a:prstGeom>
-          <a:noFill/>
-        </p:spPr>
-        <p:txBody>
-          <a:bodyPr wrap="square" anchor="t">
-            <a:spAutoFit/>
-          </a:bodyPr>
-          <a:lstStyle/>
-          <a:p>
-            <a:pPr algn="l"/>
-            <a:r>
-              <a:rPr sz="1600" b="0">
+          <a:p>
+            <a:pPr algn="l">
+              <a:lnSpc>
+                <a:spcPct val="110000"/>
+              </a:lnSpc>
+              <a:spcBef>
+                <a:spcPts val="0"/>
+              </a:spcBef>
+              <a:spcAft>
+                <a:spcPts val="800"/>
+              </a:spcAft>
+            </a:pPr>
+            <a:r>
+              <a:rPr sz="1300">
                 <a:solidFill>
                   <a:srgbClr val="102A43"/>
                 </a:solidFill>
@@ -6755,31 +6383,15 @@
               <a:t>Confirm that the rep's identifiers match the field-rep sharing login and that the doctor list looks ready for distribution.</a:t>
             </a:r>
           </a:p>
-        </p:txBody>
-      </p:sp>
-      <p:sp>
-        <p:nvSpPr>
-          <p:cNvPr id="9" name="TextBox 8"/>
-          <p:cNvSpPr txBox="1"/>
-          <p:nvPr/>
-        </p:nvSpPr>
-        <p:spPr>
-          <a:xfrm>
-            <a:off x="749808" y="2011680"/>
-            <a:ext cx="4023360" cy="256032"/>
-          </a:xfrm>
-          <a:prstGeom prst="rect">
-            <a:avLst/>
-          </a:prstGeom>
-          <a:noFill/>
-        </p:spPr>
-        <p:txBody>
-          <a:bodyPr wrap="square" anchor="t">
-            <a:spAutoFit/>
-          </a:bodyPr>
-          <a:lstStyle/>
-          <a:p>
-            <a:pPr algn="l"/>
+          <a:p>
+            <a:pPr algn="l">
+              <a:spcBef>
+                <a:spcPts val="0"/>
+              </a:spcBef>
+              <a:spcAft>
+                <a:spcPts val="200"/>
+              </a:spcAft>
+            </a:pPr>
             <a:r>
               <a:rPr sz="1200" b="1">
                 <a:solidFill>
@@ -6790,33 +6402,20 @@
               <a:t>What appears on screen</a:t>
             </a:r>
           </a:p>
-        </p:txBody>
-      </p:sp>
-      <p:sp>
-        <p:nvSpPr>
-          <p:cNvPr id="10" name="TextBox 9"/>
-          <p:cNvSpPr txBox="1"/>
-          <p:nvPr/>
-        </p:nvSpPr>
-        <p:spPr>
-          <a:xfrm>
-            <a:off x="749808" y="2267712"/>
-            <a:ext cx="3931920" cy="713232"/>
-          </a:xfrm>
-          <a:prstGeom prst="rect">
-            <a:avLst/>
-          </a:prstGeom>
-          <a:noFill/>
-        </p:spPr>
-        <p:txBody>
-          <a:bodyPr wrap="square" anchor="t">
-            <a:spAutoFit/>
-          </a:bodyPr>
-          <a:lstStyle/>
-          <a:p>
-            <a:pPr algn="l"/>
-            <a:r>
-              <a:rPr sz="1600" b="0">
+          <a:p>
+            <a:pPr algn="l">
+              <a:lnSpc>
+                <a:spcPct val="110000"/>
+              </a:lnSpc>
+              <a:spcBef>
+                <a:spcPts val="0"/>
+              </a:spcBef>
+              <a:spcAft>
+                <a:spcPts val="800"/>
+              </a:spcAft>
+            </a:pPr>
+            <a:r>
+              <a:rPr sz="1300">
                 <a:solidFill>
                   <a:srgbClr val="102A43"/>
                 </a:solidFill>
@@ -6825,31 +6424,15 @@
               <a:t>The rep record and doctor list aligned around a single campaign and rep identity.</a:t>
             </a:r>
           </a:p>
-        </p:txBody>
-      </p:sp>
-      <p:sp>
-        <p:nvSpPr>
-          <p:cNvPr id="11" name="TextBox 10"/>
-          <p:cNvSpPr txBox="1"/>
-          <p:nvPr/>
-        </p:nvSpPr>
-        <p:spPr>
-          <a:xfrm>
-            <a:off x="749808" y="3063240"/>
-            <a:ext cx="4023360" cy="256032"/>
-          </a:xfrm>
-          <a:prstGeom prst="rect">
-            <a:avLst/>
-          </a:prstGeom>
-          <a:noFill/>
-        </p:spPr>
-        <p:txBody>
-          <a:bodyPr wrap="square" anchor="t">
-            <a:spAutoFit/>
-          </a:bodyPr>
-          <a:lstStyle/>
-          <a:p>
-            <a:pPr algn="l"/>
+          <a:p>
+            <a:pPr algn="l">
+              <a:spcBef>
+                <a:spcPts val="0"/>
+              </a:spcBef>
+              <a:spcAft>
+                <a:spcPts val="200"/>
+              </a:spcAft>
+            </a:pPr>
             <a:r>
               <a:rPr sz="1200" b="1">
                 <a:solidFill>
@@ -6860,33 +6443,20 @@
               <a:t>Why it matters</a:t>
             </a:r>
           </a:p>
-        </p:txBody>
-      </p:sp>
-      <p:sp>
-        <p:nvSpPr>
-          <p:cNvPr id="12" name="TextBox 11"/>
-          <p:cNvSpPr txBox="1"/>
-          <p:nvPr/>
-        </p:nvSpPr>
-        <p:spPr>
-          <a:xfrm>
-            <a:off x="749808" y="3319272"/>
-            <a:ext cx="3931920" cy="640080"/>
-          </a:xfrm>
-          <a:prstGeom prst="rect">
-            <a:avLst/>
-          </a:prstGeom>
-          <a:noFill/>
-        </p:spPr>
-        <p:txBody>
-          <a:bodyPr wrap="square" anchor="t">
-            <a:spAutoFit/>
-          </a:bodyPr>
-          <a:lstStyle/>
-          <a:p>
-            <a:pPr algn="l"/>
-            <a:r>
-              <a:rPr sz="1500" b="0">
+          <a:p>
+            <a:pPr algn="l">
+              <a:lnSpc>
+                <a:spcPct val="110000"/>
+              </a:lnSpc>
+              <a:spcBef>
+                <a:spcPts val="0"/>
+              </a:spcBef>
+              <a:spcAft>
+                <a:spcPts val="800"/>
+              </a:spcAft>
+            </a:pPr>
+            <a:r>
+              <a:rPr sz="1300">
                 <a:solidFill>
                   <a:srgbClr val="102A43"/>
                 </a:solidFill>
@@ -6895,31 +6465,15 @@
               <a:t>If the rep cannot log in or the doctor list is wrong, the downstream sharing demo will be frustrating and misleading.</a:t>
             </a:r>
           </a:p>
-        </p:txBody>
-      </p:sp>
-      <p:sp>
-        <p:nvSpPr>
-          <p:cNvPr id="13" name="TextBox 12"/>
-          <p:cNvSpPr txBox="1"/>
-          <p:nvPr/>
-        </p:nvSpPr>
-        <p:spPr>
-          <a:xfrm>
-            <a:off x="749808" y="4069080"/>
-            <a:ext cx="4023360" cy="256032"/>
-          </a:xfrm>
-          <a:prstGeom prst="rect">
-            <a:avLst/>
-          </a:prstGeom>
-          <a:noFill/>
-        </p:spPr>
-        <p:txBody>
-          <a:bodyPr wrap="square" anchor="t">
-            <a:spAutoFit/>
-          </a:bodyPr>
-          <a:lstStyle/>
-          <a:p>
-            <a:pPr algn="l"/>
+          <a:p>
+            <a:pPr algn="l">
+              <a:spcBef>
+                <a:spcPts val="0"/>
+              </a:spcBef>
+              <a:spcAft>
+                <a:spcPts val="200"/>
+              </a:spcAft>
+            </a:pPr>
             <a:r>
               <a:rPr sz="1200" b="1">
                 <a:solidFill>
@@ -6930,33 +6484,20 @@
               <a:t>Expected result</a:t>
             </a:r>
           </a:p>
-        </p:txBody>
-      </p:sp>
-      <p:sp>
-        <p:nvSpPr>
-          <p:cNvPr id="14" name="TextBox 13"/>
-          <p:cNvSpPr txBox="1"/>
-          <p:nvPr/>
-        </p:nvSpPr>
-        <p:spPr>
-          <a:xfrm>
-            <a:off x="749808" y="4325112"/>
-            <a:ext cx="3931920" cy="566928"/>
-          </a:xfrm>
-          <a:prstGeom prst="rect">
-            <a:avLst/>
-          </a:prstGeom>
-          <a:noFill/>
-        </p:spPr>
-        <p:txBody>
-          <a:bodyPr wrap="square" anchor="t">
-            <a:spAutoFit/>
-          </a:bodyPr>
-          <a:lstStyle/>
-          <a:p>
-            <a:pPr algn="l"/>
-            <a:r>
-              <a:rPr sz="1500" b="0">
+          <a:p>
+            <a:pPr algn="l">
+              <a:lnSpc>
+                <a:spcPct val="110000"/>
+              </a:lnSpc>
+              <a:spcBef>
+                <a:spcPts val="0"/>
+              </a:spcBef>
+              <a:spcAft>
+                <a:spcPts val="800"/>
+              </a:spcAft>
+            </a:pPr>
+            <a:r>
+              <a:rPr sz="1300">
                 <a:solidFill>
                   <a:srgbClr val="102A43"/>
                 </a:solidFill>
@@ -6965,31 +6506,15 @@
               <a:t>The rep administration workflow is complete and ready to hand off to the field-rep training segment.</a:t>
             </a:r>
           </a:p>
-        </p:txBody>
-      </p:sp>
-      <p:sp>
-        <p:nvSpPr>
-          <p:cNvPr id="15" name="TextBox 14"/>
-          <p:cNvSpPr txBox="1"/>
-          <p:nvPr/>
-        </p:nvSpPr>
-        <p:spPr>
-          <a:xfrm>
-            <a:off x="749808" y="4965192"/>
-            <a:ext cx="4023360" cy="256032"/>
-          </a:xfrm>
-          <a:prstGeom prst="rect">
-            <a:avLst/>
-          </a:prstGeom>
-          <a:noFill/>
-        </p:spPr>
-        <p:txBody>
-          <a:bodyPr wrap="square" anchor="t">
-            <a:spAutoFit/>
-          </a:bodyPr>
-          <a:lstStyle/>
-          <a:p>
-            <a:pPr algn="l"/>
+          <a:p>
+            <a:pPr algn="l">
+              <a:spcBef>
+                <a:spcPts val="0"/>
+              </a:spcBef>
+              <a:spcAft>
+                <a:spcPts val="200"/>
+              </a:spcAft>
+            </a:pPr>
             <a:r>
               <a:rPr sz="1200" b="1">
                 <a:solidFill>
@@ -7000,33 +6525,20 @@
               <a:t>Trainer note</a:t>
             </a:r>
           </a:p>
-        </p:txBody>
-      </p:sp>
-      <p:sp>
-        <p:nvSpPr>
-          <p:cNvPr id="16" name="TextBox 15"/>
-          <p:cNvSpPr txBox="1"/>
-          <p:nvPr/>
-        </p:nvSpPr>
-        <p:spPr>
-          <a:xfrm>
-            <a:off x="749808" y="5212080"/>
-            <a:ext cx="3931920" cy="640080"/>
-          </a:xfrm>
-          <a:prstGeom prst="rect">
-            <a:avLst/>
-          </a:prstGeom>
-          <a:noFill/>
-        </p:spPr>
-        <p:txBody>
-          <a:bodyPr wrap="square" anchor="t">
-            <a:spAutoFit/>
-          </a:bodyPr>
-          <a:lstStyle/>
-          <a:p>
-            <a:pPr algn="l"/>
-            <a:r>
-              <a:rPr sz="1300" b="0">
+          <a:p>
+            <a:pPr algn="l">
+              <a:lnSpc>
+                <a:spcPct val="110000"/>
+              </a:lnSpc>
+              <a:spcBef>
+                <a:spcPts val="0"/>
+              </a:spcBef>
+              <a:spcAft>
+                <a:spcPts val="0"/>
+              </a:spcAft>
+            </a:pPr>
+            <a:r>
+              <a:rPr sz="1200">
                 <a:solidFill>
                   <a:srgbClr val="52667A"/>
                 </a:solidFill>
@@ -7039,7 +6551,7 @@
       </p:sp>
       <p:sp>
         <p:nvSpPr>
-          <p:cNvPr id="17" name="Rounded Rectangle 16"/>
+          <p:cNvPr id="8" name="Rounded Rectangle 7"/>
           <p:cNvSpPr/>
           <p:nvPr/>
         </p:nvSpPr>
@@ -7084,7 +6596,7 @@
       </p:sp>
       <p:sp>
         <p:nvSpPr>
-          <p:cNvPr id="18" name="TextBox 17"/>
+          <p:cNvPr id="9" name="TextBox 8"/>
           <p:cNvSpPr txBox="1"/>
           <p:nvPr/>
         </p:nvSpPr>
@@ -7119,7 +6631,7 @@
       </p:sp>
       <p:pic>
         <p:nvPicPr>
-          <p:cNvPr id="19" name="Picture 18" descr="fieldrep-doctors.png"/>
+          <p:cNvPr id="10" name="Picture 9" descr="fieldrep-doctors.png"/>
           <p:cNvPicPr>
             <a:picLocks noChangeAspect="1"/>
           </p:cNvPicPr>
@@ -7143,7 +6655,7 @@
       </p:pic>
       <p:sp>
         <p:nvSpPr>
-          <p:cNvPr id="20" name="TextBox 19"/>
+          <p:cNvPr id="11" name="TextBox 10"/>
           <p:cNvSpPr txBox="1"/>
           <p:nvPr/>
         </p:nvSpPr>
@@ -7178,7 +6690,7 @@
       </p:sp>
       <p:sp>
         <p:nvSpPr>
-          <p:cNvPr id="21" name="TextBox 20"/>
+          <p:cNvPr id="12" name="TextBox 11"/>
           <p:cNvSpPr txBox="1"/>
           <p:nvPr/>
         </p:nvSpPr>
@@ -7589,7 +7101,7 @@
                 </a:solidFill>
                 <a:latin typeface="Aptos"/>
               </a:rPr>
-              <a:t>Validated against the seeded staff-admin screens on 2026-04-11.</a:t>
+              <a:t>Validated against the seeded staff-admin screens on 2026-04-23.</a:t>
             </a:r>
           </a:p>
         </p:txBody>
@@ -7883,7 +7395,7 @@
                 </a:solidFill>
                 <a:latin typeface="Aptos"/>
               </a:rPr>
-              <a:t>Validated against the seeded staff-admin screens on 2026-04-11.</a:t>
+              <a:t>Validated against the seeded staff-admin screens on 2026-04-23.</a:t>
             </a:r>
           </a:p>
         </p:txBody>
